--- a/outputs/presentation/samsung-memory-scenario-planning.pptx
+++ b/outputs/presentation/samsung-memory-scenario-planning.pptx
@@ -26740,7 +26740,7 @@
                 </a:solidFill>
                 <a:latin typeface="맑은 고딕"/>
               </a:rPr>
-              <a:t>AI DC 착공 트래커(55.9GW·17개국) + 수요 변곡 EWI 앙상블(선행·끈적·공급 과잉 + 괴리) → RS-1 캐파 on/off·RS-5 규율을 제때 발동</a:t>
+              <a:t>AI DC 착공 트래커(55.9GW·17개국) + 수요 변곡 EWI 앙상블(선행·끈적·공급 과잉·SCM 공급망 + 괴리) → RS-1 캐파 on/off·RS-5 규율을 제때 발동</a:t>
             </a:r>
           </a:p>
         </p:txBody>
@@ -27117,7 +27117,7 @@
                 </a:solidFill>
                 <a:latin typeface="맑은 고딕"/>
               </a:rPr>
-              <a:t>복합 위험 36(주의)·공급 과잉 68(경계)·선행−끈적 괴리 +4</a:t>
+              <a:t>복합 위험 43(주의)·공급 과잉 68·SCM 56(경계 근접)·괴리 +4</a:t>
             </a:r>
           </a:p>
         </p:txBody>
@@ -27152,7 +27152,7 @@
                 </a:solidFill>
                 <a:latin typeface="맑은 고딕"/>
               </a:rPr>
-              <a:t>GPU 임대가 둔화·DC 착공 일부 취소·DRAM&gt;HBM OPM 역전(언와인드)</a:t>
+              <a:t>GPU 임대가 둔화·DRAM&gt;HBM OPM 역전·HBM sold-out·LTA(할당 정점=언와인드)</a:t>
             </a:r>
           </a:p>
         </p:txBody>
@@ -27380,7 +27380,7 @@
                 </a:solidFill>
                 <a:latin typeface="맑은 고딕"/>
               </a:rPr>
-              <a:t>수요 변곡 EWI 앙상블 — 4트랙 센싱</a:t>
+              <a:t>수요 변곡 EWI 앙상블 — 5트랙 센싱</a:t>
             </a:r>
           </a:p>
         </p:txBody>
@@ -27428,7 +27428,7 @@
         </p:nvSpPr>
         <p:spPr>
           <a:xfrm>
-            <a:off x="6583680" y="2697480"/>
+            <a:off x="6583680" y="2670048"/>
             <a:ext cx="731520" cy="365760"/>
           </a:xfrm>
           <a:prstGeom prst="rect">
@@ -27444,7 +27444,7 @@
           <a:p>
             <a:pPr algn="l"/>
             <a:r>
-              <a:rPr sz="1100" b="1" i="0">
+              <a:rPr sz="1000" b="1" i="0">
                 <a:solidFill>
                   <a:srgbClr val="D97706"/>
                 </a:solidFill>
@@ -27463,7 +27463,7 @@
         </p:nvSpPr>
         <p:spPr>
           <a:xfrm>
-            <a:off x="7315200" y="2697480"/>
+            <a:off x="7315200" y="2670048"/>
             <a:ext cx="4297680" cy="365760"/>
           </a:xfrm>
           <a:prstGeom prst="rect">
@@ -27479,7 +27479,7 @@
           <a:p>
             <a:pPr algn="l"/>
             <a:r>
-              <a:rPr sz="1050" b="1" i="0">
+              <a:rPr sz="1000" b="1" i="0">
                 <a:solidFill>
                   <a:srgbClr val="FFFFFF"/>
                 </a:solidFill>
@@ -27498,8 +27498,8 @@
         </p:nvSpPr>
         <p:spPr>
           <a:xfrm>
-            <a:off x="7315200" y="3026664"/>
-            <a:ext cx="4297680" cy="365760"/>
+            <a:off x="7315200" y="2971800"/>
+            <a:ext cx="4297680" cy="292608"/>
           </a:xfrm>
           <a:prstGeom prst="rect">
             <a:avLst/>
@@ -27514,17 +27514,17 @@
           <a:p>
             <a:pPr algn="l">
               <a:lnSpc>
-                <a:spcPct val="120000"/>
+                <a:spcPct val="110000"/>
               </a:lnSpc>
             </a:pPr>
             <a:r>
-              <a:rPr sz="900" b="0" i="0">
+              <a:rPr sz="850" b="0" i="0">
                 <a:solidFill>
                   <a:srgbClr val="FFFFFF"/>
                 </a:solidFill>
                 <a:latin typeface="맑은 고딕"/>
               </a:rPr>
-              <a:t>GPU 현물 임대가(Vast.ai)·신용 스프레드·DC 착공 파이프라인 (선행 9~18개월)</a:t>
+              <a:t>GPU 임대가(Vast.ai)·신용 스프레드·DC 착공 (선행 9~18개월)</a:t>
             </a:r>
           </a:p>
         </p:txBody>
@@ -27537,7 +27537,7 @@
         </p:nvSpPr>
         <p:spPr>
           <a:xfrm>
-            <a:off x="6583680" y="3410712"/>
+            <a:off x="6583680" y="3236976"/>
             <a:ext cx="731520" cy="365760"/>
           </a:xfrm>
           <a:prstGeom prst="rect">
@@ -27553,7 +27553,7 @@
           <a:p>
             <a:pPr algn="l"/>
             <a:r>
-              <a:rPr sz="1100" b="1" i="0">
+              <a:rPr sz="1000" b="1" i="0">
                 <a:solidFill>
                   <a:srgbClr val="D97706"/>
                 </a:solidFill>
@@ -27572,7 +27572,7 @@
         </p:nvSpPr>
         <p:spPr>
           <a:xfrm>
-            <a:off x="7315200" y="3410712"/>
+            <a:off x="7315200" y="3236976"/>
             <a:ext cx="4297680" cy="365760"/>
           </a:xfrm>
           <a:prstGeom prst="rect">
@@ -27588,7 +27588,7 @@
           <a:p>
             <a:pPr algn="l"/>
             <a:r>
-              <a:rPr sz="1050" b="1" i="0">
+              <a:rPr sz="1000" b="1" i="0">
                 <a:solidFill>
                   <a:srgbClr val="FFFFFF"/>
                 </a:solidFill>
@@ -27607,8 +27607,8 @@
         </p:nvSpPr>
         <p:spPr>
           <a:xfrm>
-            <a:off x="7315200" y="3739896"/>
-            <a:ext cx="4297680" cy="365760"/>
+            <a:off x="7315200" y="3538728"/>
+            <a:ext cx="4297680" cy="292608"/>
           </a:xfrm>
           <a:prstGeom prst="rect">
             <a:avLst/>
@@ -27623,17 +27623,17 @@
           <a:p>
             <a:pPr algn="l">
               <a:lnSpc>
-                <a:spcPct val="120000"/>
+                <a:spcPct val="110000"/>
               </a:lnSpc>
             </a:pPr>
             <a:r>
-              <a:rPr sz="900" b="0" i="0">
+              <a:rPr sz="850" b="0" i="0">
                 <a:solidFill>
                   <a:srgbClr val="FFFFFF"/>
                 </a:solidFill>
                 <a:latin typeface="맑은 고딕"/>
               </a:rPr>
-              <a:t>메모리 계약가·리드타임·재고일수 — 후행하지만 확정적</a:t>
+              <a:t>메모리 계약가·리드타임·재고일수 — 후행·확정적</a:t>
             </a:r>
           </a:p>
         </p:txBody>
@@ -27646,7 +27646,7 @@
         </p:nvSpPr>
         <p:spPr>
           <a:xfrm>
-            <a:off x="6583680" y="4123944"/>
+            <a:off x="6583680" y="3803904"/>
             <a:ext cx="731520" cy="365760"/>
           </a:xfrm>
           <a:prstGeom prst="rect">
@@ -27662,7 +27662,7 @@
           <a:p>
             <a:pPr algn="l"/>
             <a:r>
-              <a:rPr sz="1100" b="1" i="0">
+              <a:rPr sz="1000" b="1" i="0">
                 <a:solidFill>
                   <a:srgbClr val="D97706"/>
                 </a:solidFill>
@@ -27681,7 +27681,7 @@
         </p:nvSpPr>
         <p:spPr>
           <a:xfrm>
-            <a:off x="7315200" y="4123944"/>
+            <a:off x="7315200" y="3803904"/>
             <a:ext cx="4297680" cy="365760"/>
           </a:xfrm>
           <a:prstGeom prst="rect">
@@ -27697,7 +27697,7 @@
           <a:p>
             <a:pPr algn="l"/>
             <a:r>
-              <a:rPr sz="1050" b="1" i="0">
+              <a:rPr sz="1000" b="1" i="0">
                 <a:solidFill>
                   <a:srgbClr val="FFFFFF"/>
                 </a:solidFill>
@@ -27716,8 +27716,8 @@
         </p:nvSpPr>
         <p:spPr>
           <a:xfrm>
-            <a:off x="7315200" y="4453128"/>
-            <a:ext cx="4297680" cy="365760"/>
+            <a:off x="7315200" y="4105656"/>
+            <a:ext cx="4297680" cy="292608"/>
           </a:xfrm>
           <a:prstGeom prst="rect">
             <a:avLst/>
@@ -27732,17 +27732,17 @@
           <a:p>
             <a:pPr algn="l">
               <a:lnSpc>
-                <a:spcPct val="120000"/>
+                <a:spcPct val="110000"/>
               </a:lnSpc>
             </a:pPr>
             <a:r>
-              <a:rPr sz="900" b="0" i="0">
+              <a:rPr sz="850" b="0" i="0">
                 <a:solidFill>
                   <a:srgbClr val="FFFFFF"/>
                 </a:solidFill>
                 <a:latin typeface="맑은 고딕"/>
               </a:rPr>
-              <a:t>DRAM&gt;HBM OPM 역전·book-to-bill·CoWoS 증설 = 정점 신호</a:t>
+              <a:t>DRAM&gt;HBM OPM 역전·book-to-bill·CoWoS = 정점 신호</a:t>
             </a:r>
           </a:p>
         </p:txBody>
@@ -27755,7 +27755,7 @@
         </p:nvSpPr>
         <p:spPr>
           <a:xfrm>
-            <a:off x="6583680" y="4837176"/>
+            <a:off x="6583680" y="4370831"/>
             <a:ext cx="731520" cy="365760"/>
           </a:xfrm>
           <a:prstGeom prst="rect">
@@ -27771,7 +27771,7 @@
           <a:p>
             <a:pPr algn="l"/>
             <a:r>
-              <a:rPr sz="1100" b="1" i="0">
+              <a:rPr sz="1000" b="1" i="0">
                 <a:solidFill>
                   <a:srgbClr val="D97706"/>
                 </a:solidFill>
@@ -27790,7 +27790,7 @@
         </p:nvSpPr>
         <p:spPr>
           <a:xfrm>
-            <a:off x="7315200" y="4837176"/>
+            <a:off x="7315200" y="4370831"/>
             <a:ext cx="4297680" cy="365760"/>
           </a:xfrm>
           <a:prstGeom prst="rect">
@@ -27806,13 +27806,13 @@
           <a:p>
             <a:pPr algn="l"/>
             <a:r>
-              <a:rPr sz="1050" b="1" i="0">
+              <a:rPr sz="1000" b="1" i="0">
                 <a:solidFill>
                   <a:srgbClr val="FFFFFF"/>
                 </a:solidFill>
                 <a:latin typeface="맑은 고딕"/>
               </a:rPr>
-              <a:t>괴리 밴드 (Divergence)</a:t>
+              <a:t>SCM 공급망 (신규)</a:t>
             </a:r>
           </a:p>
         </p:txBody>
@@ -27825,8 +27825,8 @@
         </p:nvSpPr>
         <p:spPr>
           <a:xfrm>
-            <a:off x="7315200" y="5166360"/>
-            <a:ext cx="4297680" cy="365760"/>
+            <a:off x="7315200" y="4672583"/>
+            <a:ext cx="4297680" cy="292608"/>
           </a:xfrm>
           <a:prstGeom prst="rect">
             <a:avLst/>
@@ -27841,24 +27841,133 @@
           <a:p>
             <a:pPr algn="l">
               <a:lnSpc>
-                <a:spcPct val="120000"/>
+                <a:spcPct val="110000"/>
               </a:lnSpc>
             </a:pPr>
             <a:r>
-              <a:rPr sz="900" b="0" i="0">
+              <a:rPr sz="850" b="0" i="0">
                 <a:solidFill>
                   <a:srgbClr val="FFFFFF"/>
                 </a:solidFill>
                 <a:latin typeface="맑은 고딕"/>
               </a:rPr>
-              <a:t>선행−끈적 괴리 2분기 연속 확대 = 하락 변곡 선행 윈도우</a:t>
-            </a:r>
-          </a:p>
-        </p:txBody>
-      </p:sp>
-      <p:sp>
-        <p:nvSpPr>
-          <p:cNvPr id="34" name="Rectangle 33"/>
+              <a:t>가짜수요 갭·더블오더링·할당 = 채찍효과 언와인드 선포착</a:t>
+            </a:r>
+          </a:p>
+        </p:txBody>
+      </p:sp>
+      <p:sp>
+        <p:nvSpPr>
+          <p:cNvPr id="34" name="TextBox 33"/>
+          <p:cNvSpPr txBox="1"/>
+          <p:nvPr/>
+        </p:nvSpPr>
+        <p:spPr>
+          <a:xfrm>
+            <a:off x="6583680" y="4937760"/>
+            <a:ext cx="731520" cy="365760"/>
+          </a:xfrm>
+          <a:prstGeom prst="rect">
+            <a:avLst/>
+          </a:prstGeom>
+          <a:noFill/>
+        </p:spPr>
+        <p:txBody>
+          <a:bodyPr wrap="square" lIns="0" rIns="0" tIns="0" bIns="0" anchor="t">
+            <a:spAutoFit/>
+          </a:bodyPr>
+          <a:lstStyle/>
+          <a:p>
+            <a:pPr algn="l"/>
+            <a:r>
+              <a:rPr sz="1000" b="1" i="0">
+                <a:solidFill>
+                  <a:srgbClr val="D97706"/>
+                </a:solidFill>
+                <a:latin typeface="맑은 고딕"/>
+              </a:rPr>
+              <a:t>트랙 5</a:t>
+            </a:r>
+          </a:p>
+        </p:txBody>
+      </p:sp>
+      <p:sp>
+        <p:nvSpPr>
+          <p:cNvPr id="35" name="TextBox 34"/>
+          <p:cNvSpPr txBox="1"/>
+          <p:nvPr/>
+        </p:nvSpPr>
+        <p:spPr>
+          <a:xfrm>
+            <a:off x="7315200" y="4937760"/>
+            <a:ext cx="4297680" cy="365760"/>
+          </a:xfrm>
+          <a:prstGeom prst="rect">
+            <a:avLst/>
+          </a:prstGeom>
+          <a:noFill/>
+        </p:spPr>
+        <p:txBody>
+          <a:bodyPr wrap="square" lIns="0" rIns="0" tIns="0" bIns="0" anchor="t">
+            <a:spAutoFit/>
+          </a:bodyPr>
+          <a:lstStyle/>
+          <a:p>
+            <a:pPr algn="l"/>
+            <a:r>
+              <a:rPr sz="1000" b="1" i="0">
+                <a:solidFill>
+                  <a:srgbClr val="FFFFFF"/>
+                </a:solidFill>
+                <a:latin typeface="맑은 고딕"/>
+              </a:rPr>
+              <a:t>괴리 밴드 (Divergence)</a:t>
+            </a:r>
+          </a:p>
+        </p:txBody>
+      </p:sp>
+      <p:sp>
+        <p:nvSpPr>
+          <p:cNvPr id="36" name="TextBox 35"/>
+          <p:cNvSpPr txBox="1"/>
+          <p:nvPr/>
+        </p:nvSpPr>
+        <p:spPr>
+          <a:xfrm>
+            <a:off x="7315200" y="5239512"/>
+            <a:ext cx="4297680" cy="292608"/>
+          </a:xfrm>
+          <a:prstGeom prst="rect">
+            <a:avLst/>
+          </a:prstGeom>
+          <a:noFill/>
+        </p:spPr>
+        <p:txBody>
+          <a:bodyPr wrap="square" lIns="0" rIns="0" tIns="0" bIns="0" anchor="t">
+            <a:spAutoFit/>
+          </a:bodyPr>
+          <a:lstStyle/>
+          <a:p>
+            <a:pPr algn="l">
+              <a:lnSpc>
+                <a:spcPct val="110000"/>
+              </a:lnSpc>
+            </a:pPr>
+            <a:r>
+              <a:rPr sz="850" b="0" i="0">
+                <a:solidFill>
+                  <a:srgbClr val="FFFFFF"/>
+                </a:solidFill>
+                <a:latin typeface="맑은 고딕"/>
+              </a:rPr>
+              <a:t>선행−끈적 괴리 2분기 확대 = 하락 변곡 선행 윈도우</a:t>
+            </a:r>
+          </a:p>
+        </p:txBody>
+      </p:sp>
+      <p:sp>
+        <p:nvSpPr>
+          <p:cNvPr id="37" name="Rectangle 36"/>
           <p:cNvSpPr/>
           <p:nvPr/>
         </p:nvSpPr>
@@ -27902,7 +28011,7 @@
       </p:sp>
       <p:sp>
         <p:nvSpPr>
-          <p:cNvPr id="35" name="TextBox 34"/>
+          <p:cNvPr id="38" name="TextBox 37"/>
           <p:cNvSpPr txBox="1"/>
           <p:nvPr/>
         </p:nvSpPr>
@@ -27937,7 +28046,7 @@
       </p:sp>
       <p:sp>
         <p:nvSpPr>
-          <p:cNvPr id="36" name="Rectangle 35"/>
+          <p:cNvPr id="39" name="Rectangle 38"/>
           <p:cNvSpPr/>
           <p:nvPr/>
         </p:nvSpPr>
@@ -27981,7 +28090,7 @@
       </p:sp>
       <p:sp>
         <p:nvSpPr>
-          <p:cNvPr id="37" name="Rectangle 36"/>
+          <p:cNvPr id="40" name="Rectangle 39"/>
           <p:cNvSpPr/>
           <p:nvPr/>
         </p:nvSpPr>
@@ -28025,7 +28134,7 @@
       </p:sp>
       <p:sp>
         <p:nvSpPr>
-          <p:cNvPr id="38" name="TextBox 37"/>
+          <p:cNvPr id="41" name="TextBox 40"/>
           <p:cNvSpPr txBox="1"/>
           <p:nvPr/>
         </p:nvSpPr>
@@ -28060,7 +28169,7 @@
       </p:sp>
       <p:sp>
         <p:nvSpPr>
-          <p:cNvPr id="39" name="TextBox 38"/>
+          <p:cNvPr id="42" name="TextBox 41"/>
           <p:cNvSpPr txBox="1"/>
           <p:nvPr/>
         </p:nvSpPr>
@@ -28095,7 +28204,7 @@
       </p:sp>
       <p:cxnSp>
         <p:nvCxnSpPr>
-          <p:cNvPr id="40" name="Connector 39"/>
+          <p:cNvPr id="43" name="Connector 42"/>
           <p:cNvCxnSpPr/>
           <p:nvPr/>
         </p:nvCxnSpPr>
@@ -28130,7 +28239,7 @@
       </p:cxnSp>
       <p:sp>
         <p:nvSpPr>
-          <p:cNvPr id="41" name="TextBox 40"/>
+          <p:cNvPr id="44" name="TextBox 43"/>
           <p:cNvSpPr txBox="1"/>
           <p:nvPr/>
         </p:nvSpPr>
@@ -28165,7 +28274,7 @@
       </p:sp>
       <p:sp>
         <p:nvSpPr>
-          <p:cNvPr id="42" name="TextBox 41"/>
+          <p:cNvPr id="45" name="TextBox 44"/>
           <p:cNvSpPr txBox="1"/>
           <p:nvPr/>
         </p:nvSpPr>

--- a/outputs/presentation/samsung-memory-scenario-planning.pptx
+++ b/outputs/presentation/samsung-memory-scenario-planning.pptx
@@ -5821,7 +5821,7 @@
                 </a:solidFill>
                 <a:latin typeface="맑은 고딕"/>
               </a:rPr>
-              <a:t>2×2 매트릭스 (4개 시나리오) + E 와일드카드 — 확률 합 100%, 각 시나리오의 2035년 시장 규모 명시</a:t>
+              <a:t>2×2 매트릭스 (4개 시나리오) + E 와일드카드 — 각 시나리오의 2035년 시장 규모 명시</a:t>
             </a:r>
           </a:p>
         </p:txBody>
@@ -5878,7 +5878,7 @@
         <p:spPr>
           <a:xfrm>
             <a:off x="2011680" y="1691640"/>
-            <a:ext cx="7467361" cy="4114800"/>
+            <a:ext cx="7473820" cy="4114800"/>
           </a:xfrm>
           <a:prstGeom prst="rect">
             <a:avLst/>
@@ -6038,7 +6038,7 @@
                 </a:solidFill>
                 <a:latin typeface="맑은 고딕"/>
               </a:rPr>
-              <a:t>5개 시나리오 — 가장 가능성 높은 B(35%) + 헤징 4개 = 어떤 미래가 와도 대비</a:t>
+              <a:t>5개 시나리오 — 최유력 B + 헤징 4개 = 어떤 미래가 와도 대비</a:t>
             </a:r>
           </a:p>
         </p:txBody>
@@ -6231,7 +6231,7 @@
                 </a:solidFill>
                 <a:latin typeface="맑은 고딕"/>
               </a:rPr>
-              <a:t>확률 35% (32~36%) · 2035 시장 $520B (전 시나리오 최대) · 삼성 매출 $120B 가능 — 4개 전제 조건 충족 시</a:t>
+              <a:t>최유력 시나리오 · 2035 시장 $520B (전 시나리오 최대) · 삼성 매출 $120B 가능 — 4개 전제 조건 충족 시</a:t>
             </a:r>
           </a:p>
         </p:txBody>
@@ -6345,7 +6345,7 @@
                 </a:solidFill>
                 <a:latin typeface="맑은 고딕"/>
               </a:rPr>
-              <a:t>⭐  MAIN BET — "AI 르네상스"  |  확률 35%  |  2035 시장 $520B (전 시나리오 최대)</a:t>
+              <a:t>⭐  MAIN BET — "AI 르네상스"  |  최유력 시나리오  |  2035 시장 $520B (전 시나리오 최대)</a:t>
             </a:r>
           </a:p>
         </p:txBody>
@@ -28447,7 +28447,7 @@
         <p:spPr>
           <a:xfrm>
             <a:off x="457200" y="1691640"/>
-            <a:ext cx="6766560" cy="4165487"/>
+            <a:ext cx="6766560" cy="4161623"/>
           </a:xfrm>
           <a:prstGeom prst="rect">
             <a:avLst/>
